--- a/HockeyPrediction.pptx
+++ b/HockeyPrediction.pptx
@@ -20060,6 +20060,271 @@
           </a:prstGeom>
         </p:spPr>
       </p:pic>
+      <p:sp>
+        <p:nvSpPr>
+          <p:cNvPr id="2" name="Content Placeholder 11">
+            <a:extLst>
+              <a:ext uri="{FF2B5EF4-FFF2-40B4-BE49-F238E27FC236}">
+                <a16:creationId xmlns:a16="http://schemas.microsoft.com/office/drawing/2014/main" id="{75B2BC8C-C750-DD38-E40F-AA8530FB605B}"/>
+              </a:ext>
+            </a:extLst>
+          </p:cNvPr>
+          <p:cNvSpPr txBox="1">
+            <a:spLocks/>
+          </p:cNvSpPr>
+          <p:nvPr/>
+        </p:nvSpPr>
+        <p:spPr>
+          <a:xfrm>
+            <a:off x="619125" y="5185064"/>
+            <a:ext cx="6276108" cy="1444336"/>
+          </a:xfrm>
+          <a:prstGeom prst="rect">
+            <a:avLst/>
+          </a:prstGeom>
+        </p:spPr>
+        <p:txBody>
+          <a:bodyPr vert="horz" lIns="91440" tIns="45720" rIns="91440" bIns="45720" rtlCol="0">
+            <a:normAutofit lnSpcReduction="10000"/>
+          </a:bodyPr>
+          <a:lstStyle>
+            <a:lvl1pPr marL="228600" indent="-228600" algn="l" defTabSz="914400" rtl="0" eaLnBrk="1" latinLnBrk="0" hangingPunct="1">
+              <a:lnSpc>
+                <a:spcPct val="120000"/>
+              </a:lnSpc>
+              <a:spcBef>
+                <a:spcPts val="0"/>
+              </a:spcBef>
+              <a:buFont typeface="Arial" panose="020B0604020202020204" pitchFamily="34" charset="0"/>
+              <a:buChar char="•"/>
+              <a:defRPr sz="1400" b="0" i="0" kern="1200">
+                <a:solidFill>
+                  <a:schemeClr val="tx1"/>
+                </a:solidFill>
+                <a:latin typeface="+mn-lt"/>
+                <a:ea typeface="+mn-ea"/>
+                <a:cs typeface="+mn-cs"/>
+              </a:defRPr>
+            </a:lvl1pPr>
+            <a:lvl2pPr marL="457200" indent="-228600" algn="l" defTabSz="914400" rtl="0" eaLnBrk="1" latinLnBrk="0" hangingPunct="1">
+              <a:lnSpc>
+                <a:spcPct val="120000"/>
+              </a:lnSpc>
+              <a:spcBef>
+                <a:spcPts val="0"/>
+              </a:spcBef>
+              <a:buFont typeface="Arial" panose="020B0604020202020204" pitchFamily="34" charset="0"/>
+              <a:buChar char="•"/>
+              <a:defRPr sz="1400" b="0" i="0" kern="1200">
+                <a:solidFill>
+                  <a:schemeClr val="tx1"/>
+                </a:solidFill>
+                <a:latin typeface="+mn-lt"/>
+                <a:ea typeface="+mn-ea"/>
+                <a:cs typeface="+mn-cs"/>
+              </a:defRPr>
+            </a:lvl2pPr>
+            <a:lvl3pPr marL="685800" indent="-228600" algn="l" defTabSz="914400" rtl="0" eaLnBrk="1" latinLnBrk="0" hangingPunct="1">
+              <a:lnSpc>
+                <a:spcPct val="120000"/>
+              </a:lnSpc>
+              <a:spcBef>
+                <a:spcPts val="0"/>
+              </a:spcBef>
+              <a:buFont typeface="Arial" panose="020B0604020202020204" pitchFamily="34" charset="0"/>
+              <a:buChar char="•"/>
+              <a:defRPr sz="1400" b="0" i="0" kern="1200">
+                <a:solidFill>
+                  <a:schemeClr val="tx1"/>
+                </a:solidFill>
+                <a:latin typeface="+mn-lt"/>
+                <a:ea typeface="+mn-ea"/>
+                <a:cs typeface="+mn-cs"/>
+              </a:defRPr>
+            </a:lvl3pPr>
+            <a:lvl4pPr marL="914400" indent="-228600" algn="l" defTabSz="914400" rtl="0" eaLnBrk="1" latinLnBrk="0" hangingPunct="1">
+              <a:lnSpc>
+                <a:spcPct val="120000"/>
+              </a:lnSpc>
+              <a:spcBef>
+                <a:spcPts val="0"/>
+              </a:spcBef>
+              <a:buFont typeface="Arial" panose="020B0604020202020204" pitchFamily="34" charset="0"/>
+              <a:buChar char="•"/>
+              <a:defRPr sz="1400" b="0" i="0" kern="1200">
+                <a:solidFill>
+                  <a:schemeClr val="tx1"/>
+                </a:solidFill>
+                <a:latin typeface="+mn-lt"/>
+                <a:ea typeface="+mn-ea"/>
+                <a:cs typeface="+mn-cs"/>
+              </a:defRPr>
+            </a:lvl4pPr>
+            <a:lvl5pPr marL="1143000" indent="-228600" algn="l" defTabSz="914400" rtl="0" eaLnBrk="1" latinLnBrk="0" hangingPunct="1">
+              <a:lnSpc>
+                <a:spcPct val="120000"/>
+              </a:lnSpc>
+              <a:spcBef>
+                <a:spcPts val="0"/>
+              </a:spcBef>
+              <a:buFont typeface="Arial" panose="020B0604020202020204" pitchFamily="34" charset="0"/>
+              <a:buChar char="•"/>
+              <a:defRPr sz="1400" b="0" i="0" kern="1200">
+                <a:solidFill>
+                  <a:schemeClr val="tx1"/>
+                </a:solidFill>
+                <a:latin typeface="+mn-lt"/>
+                <a:ea typeface="+mn-ea"/>
+                <a:cs typeface="+mn-cs"/>
+              </a:defRPr>
+            </a:lvl5pPr>
+            <a:lvl6pPr marL="2514600" indent="-228600" algn="l" defTabSz="914400" rtl="0" eaLnBrk="1" latinLnBrk="0" hangingPunct="1">
+              <a:lnSpc>
+                <a:spcPct val="90000"/>
+              </a:lnSpc>
+              <a:spcBef>
+                <a:spcPts val="500"/>
+              </a:spcBef>
+              <a:buFont typeface="Arial" panose="020B0604020202020204" pitchFamily="34" charset="0"/>
+              <a:buChar char="•"/>
+              <a:defRPr sz="1800" kern="1200">
+                <a:solidFill>
+                  <a:schemeClr val="tx1"/>
+                </a:solidFill>
+                <a:latin typeface="+mn-lt"/>
+                <a:ea typeface="+mn-ea"/>
+                <a:cs typeface="+mn-cs"/>
+              </a:defRPr>
+            </a:lvl6pPr>
+            <a:lvl7pPr marL="2971800" indent="-228600" algn="l" defTabSz="914400" rtl="0" eaLnBrk="1" latinLnBrk="0" hangingPunct="1">
+              <a:lnSpc>
+                <a:spcPct val="90000"/>
+              </a:lnSpc>
+              <a:spcBef>
+                <a:spcPts val="500"/>
+              </a:spcBef>
+              <a:buFont typeface="Arial" panose="020B0604020202020204" pitchFamily="34" charset="0"/>
+              <a:buChar char="•"/>
+              <a:defRPr sz="1800" kern="1200">
+                <a:solidFill>
+                  <a:schemeClr val="tx1"/>
+                </a:solidFill>
+                <a:latin typeface="+mn-lt"/>
+                <a:ea typeface="+mn-ea"/>
+                <a:cs typeface="+mn-cs"/>
+              </a:defRPr>
+            </a:lvl7pPr>
+            <a:lvl8pPr marL="3429000" indent="-228600" algn="l" defTabSz="914400" rtl="0" eaLnBrk="1" latinLnBrk="0" hangingPunct="1">
+              <a:lnSpc>
+                <a:spcPct val="90000"/>
+              </a:lnSpc>
+              <a:spcBef>
+                <a:spcPts val="500"/>
+              </a:spcBef>
+              <a:buFont typeface="Arial" panose="020B0604020202020204" pitchFamily="34" charset="0"/>
+              <a:buChar char="•"/>
+              <a:defRPr sz="1800" kern="1200">
+                <a:solidFill>
+                  <a:schemeClr val="tx1"/>
+                </a:solidFill>
+                <a:latin typeface="+mn-lt"/>
+                <a:ea typeface="+mn-ea"/>
+                <a:cs typeface="+mn-cs"/>
+              </a:defRPr>
+            </a:lvl8pPr>
+            <a:lvl9pPr marL="3886200" indent="-228600" algn="l" defTabSz="914400" rtl="0" eaLnBrk="1" latinLnBrk="0" hangingPunct="1">
+              <a:lnSpc>
+                <a:spcPct val="90000"/>
+              </a:lnSpc>
+              <a:spcBef>
+                <a:spcPts val="500"/>
+              </a:spcBef>
+              <a:buFont typeface="Arial" panose="020B0604020202020204" pitchFamily="34" charset="0"/>
+              <a:buChar char="•"/>
+              <a:defRPr sz="1800" kern="1200">
+                <a:solidFill>
+                  <a:schemeClr val="tx1"/>
+                </a:solidFill>
+                <a:latin typeface="+mn-lt"/>
+                <a:ea typeface="+mn-ea"/>
+                <a:cs typeface="+mn-cs"/>
+              </a:defRPr>
+            </a:lvl9pPr>
+          </a:lstStyle>
+          <a:p>
+            <a:pPr marL="0" indent="0">
+              <a:buFont typeface="Arial" panose="020B0604020202020204" pitchFamily="34" charset="0"/>
+              <a:buNone/>
+            </a:pPr>
+            <a:r>
+              <a:rPr lang="de-CH" dirty="0"/>
+              <a:t>Und mit linearer Regression</a:t>
+            </a:r>
+          </a:p>
+          <a:p>
+            <a:pPr marL="0" indent="0">
+              <a:buFont typeface="Arial" panose="020B0604020202020204" pitchFamily="34" charset="0"/>
+              <a:buNone/>
+            </a:pPr>
+            <a:r>
+              <a:rPr lang="de-CH" dirty="0"/>
+              <a:t>SVS: </a:t>
+            </a:r>
+            <a:r>
+              <a:rPr lang="de-DE" dirty="0"/>
+              <a:t>Anzahl gehaltener Schüsse im </a:t>
+            </a:r>
+            <a:r>
+              <a:rPr lang="de-DE" dirty="0" err="1"/>
+              <a:t>Verhältniss</a:t>
+            </a:r>
+            <a:r>
+              <a:rPr lang="de-DE" dirty="0"/>
+              <a:t> zu Anzahl Schüsse aufs Tor.</a:t>
+            </a:r>
+          </a:p>
+          <a:p>
+            <a:pPr>
+              <a:lnSpc>
+                <a:spcPts val="1425"/>
+              </a:lnSpc>
+              <a:buFont typeface="Arial" panose="020B0604020202020204" pitchFamily="34" charset="0"/>
+              <a:buNone/>
+            </a:pPr>
+            <a:r>
+              <a:rPr lang="de-CH" dirty="0"/>
+              <a:t>Training: Erste 10 Runden, Test Runde 11-20</a:t>
+            </a:r>
+          </a:p>
+          <a:p>
+            <a:pPr>
+              <a:lnSpc>
+                <a:spcPts val="1425"/>
+              </a:lnSpc>
+              <a:buFont typeface="Wingdings" panose="05000000000000000000" pitchFamily="2" charset="2"/>
+              <a:buChar char="à"/>
+            </a:pPr>
+            <a:r>
+              <a:rPr lang="de-CH" dirty="0" err="1"/>
+              <a:t>Accuracy</a:t>
+            </a:r>
+            <a:r>
+              <a:rPr lang="de-CH" dirty="0"/>
+              <a:t>: 70%</a:t>
+            </a:r>
+          </a:p>
+          <a:p>
+            <a:pPr marL="0" indent="0">
+              <a:buFont typeface="Arial" panose="020B0604020202020204" pitchFamily="34" charset="0"/>
+              <a:buNone/>
+            </a:pPr>
+            <a:br>
+              <a:rPr lang="de-DE" dirty="0"/>
+            </a:br>
+            <a:endParaRPr lang="de-CH" dirty="0"/>
+          </a:p>
+        </p:txBody>
+      </p:sp>
     </p:spTree>
     <p:extLst>
       <p:ext uri="{BB962C8B-B14F-4D97-AF65-F5344CB8AC3E}">
